--- a/F6_SP_Lesson_6_2013_Part_B2_Cloze_PPT.pptx
+++ b/F6_SP_Lesson_6_2013_Part_B2_Cloze_PPT.pptx
@@ -6375,7 +6375,7 @@
                 </a:solidFill>
                 <a:latin typeface="Aptos"/>
               </a:rPr>
-              <a:t>autonomy</a:t>
+              <a:t>conform</a:t>
             </a:r>
             <a:r>
               <a:rPr sz="1200" b="0" i="0">
@@ -6384,7 +6384,7 @@
                 </a:solidFill>
                 <a:latin typeface="Aptos"/>
               </a:rPr>
-              <a:t>     Line 15</a:t>
+              <a:t>     Line 45</a:t>
             </a:r>
           </a:p>
         </p:txBody>
@@ -7658,7 +7658,7 @@
                 </a:solidFill>
                 <a:latin typeface="Aptos"/>
               </a:rPr>
-              <a:t>A. an imagined perfect world; the opposite of a dystopia.</a:t>
+              <a:t>A. an imagined perfect world, in which everything is good.</a:t>
             </a:r>
           </a:p>
         </p:txBody>
@@ -7903,7 +7903,7 @@
                 </a:solidFill>
                 <a:latin typeface="Aptos"/>
               </a:rPr>
-              <a:t>H. the freedom to make your own decisions.</a:t>
+              <a:t>H. to behave in the same way as everyone else; to follow a fixed standard.</a:t>
             </a:r>
           </a:p>
         </p:txBody>
@@ -7938,7 +7938,7 @@
                 </a:solidFill>
                 <a:latin typeface="Aptos"/>
               </a:rPr>
-              <a:t>I. demanding total obedience; allowing no personal freedom.</a:t>
+              <a:t>I. demanding total obedience; allowing no personal choice.</a:t>
             </a:r>
           </a:p>
         </p:txBody>
@@ -8898,7 +8898,7 @@
                 </a:solidFill>
                 <a:latin typeface="Aptos"/>
               </a:rPr>
-              <a:t>1   Read the whole summary first</a:t>
+              <a:t>1   Read the whole summary carefully</a:t>
             </a:r>
           </a:p>
           <a:p>
@@ -9231,7 +9231,7 @@
                 </a:solidFill>
                 <a:latin typeface="Aptos"/>
               </a:rPr>
-              <a:t>ONE word per blank (fixed pairs like “crime rate” are accepted as one answer).</a:t>
+              <a:t>ONE word per blank — if the text prints a fixed pair, the pair counts as one answer.</a:t>
             </a:r>
           </a:p>
           <a:p>
@@ -12609,7 +12609,7 @@
                 </a:solidFill>
                 <a:latin typeface="Aptos"/>
               </a:rPr>
-              <a:t>Watch the form: -er (safer) · past participle (protected)</a:t>
+              <a:t>Watch the FORM, not just the word: comparative -er · past participle -ed</a:t>
             </a:r>
           </a:p>
           <a:p>

--- a/F6_SP_Lesson_6_2013_Part_B2_Cloze_PPT.pptx
+++ b/F6_SP_Lesson_6_2013_Part_B2_Cloze_PPT.pptx
@@ -820,31 +820,37 @@
           <a:p>
             <a:r>
               <a:rPr sz="1200"/>
-              <a:t>Do the two EASIER demos together, then the two HARDER ones. One click each to reveal the answer.</a:t>
+              <a:t>Read the demo paragraph together first (one student reads it aloud).</a:t>
             </a:r>
           </a:p>
           <a:p>
             <a:r>
               <a:rPr sz="1200"/>
-              <a:t>Demo 1: “may seem pleasant enough” → pleasant (straight lift).</a:t>
+              <a:t>Then one click per card reveals only that card’s answer.</a:t>
             </a:r>
           </a:p>
           <a:p>
             <a:r>
               <a:rPr sz="1200"/>
-              <a:t>Demo 2: “have been around for decades” → decades (the -s matters).</a:t>
+              <a:t>Easier 1 — “her own shelf” → own (possessive + noun = adjective; straight lift).</a:t>
             </a:r>
           </a:p>
           <a:p>
             <a:r>
               <a:rPr sz="1200"/>
-              <a:t>Demo 3: “an indictment of reality TV, but it is not an argument” → the words around the blanks fix the word class (an + noun).</a:t>
+              <a:t>Easier 2 — “more than two hundred students” → hundred (copy the exact form: no -s after “two”).</a:t>
             </a:r>
           </a:p>
           <a:p>
             <a:r>
               <a:rPr sz="1200"/>
-              <a:t>Demo 4: “absolutely crucial to…” and “reluctant to depict…” — the two words sit far apart; scan the whole paragraph.</a:t>
+              <a:t>Harder 1 — “the reviews spread quickly” → the club grew … quickly (adverb from the surrounding sentence).</a:t>
+            </a:r>
+          </a:p>
+          <a:p>
+            <a:r>
+              <a:rPr sz="1200"/>
+              <a:t>Harder 2 — “would distract students from their homework” → distract (verb after “would”); “members borrow twice as many books” → borrow (verb after “members”).</a:t>
             </a:r>
           </a:p>
         </p:txBody>
@@ -8910,7 +8916,7 @@
                 </a:solidFill>
                 <a:latin typeface="Aptos"/>
               </a:rPr>
-              <a:t>The summary is a PARAPHRASE of the text — the words around the blank are usually different.</a:t>
+              <a:t>The summary is a PARAPHRASE — it uses different words. Example: the summary says “asked for more space”; the paragraph says “asked the principal for a bigger room”.</a:t>
             </a:r>
           </a:p>
           <a:p>
@@ -8922,7 +8928,7 @@
                 </a:solidFill>
                 <a:latin typeface="Aptos"/>
               </a:rPr>
-              <a:t>The question tells you where to look: “Based on paragraph 3 …”.</a:t>
+              <a:t>Find the paragraph first: the question names it (“Based on paragraph 2 …”).</a:t>
             </a:r>
           </a:p>
         </p:txBody>
@@ -9013,7 +9019,7 @@
                 </a:solidFill>
                 <a:latin typeface="Aptos"/>
               </a:rPr>
-              <a:t>a / an + ______  = noun        a higher ______  = comparative + noun</a:t>
+              <a:t>a / an + ______  = noun            more ______  = adjective (comparative)</a:t>
             </a:r>
           </a:p>
           <a:p>
@@ -9025,7 +9031,7 @@
                 </a:solidFill>
                 <a:latin typeface="Aptos"/>
               </a:rPr>
-              <a:t>more ______  = adjective        was ______ by  = past participle</a:t>
+              <a:t>grew ______  = adverb (-ly)        would ______  = verb (base form)</a:t>
             </a:r>
           </a:p>
           <a:p>
@@ -9037,7 +9043,7 @@
                 </a:solidFill>
                 <a:latin typeface="Aptos"/>
               </a:rPr>
-              <a:t>shown ______  = adverb or preposition phrase</a:t>
+              <a:t>by + ______  = noun or -ing form</a:t>
             </a:r>
           </a:p>
         </p:txBody>
@@ -9116,7 +9122,7 @@
                 </a:solidFill>
                 <a:latin typeface="Aptos"/>
               </a:rPr>
-              <a:t>3   Hunt for the matching idea in the paragraph</a:t>
+              <a:t>3   Hunt for the matching IDEA in the paragraph</a:t>
             </a:r>
           </a:p>
           <a:p>
@@ -9128,7 +9134,7 @@
                 </a:solidFill>
                 <a:latin typeface="Aptos"/>
               </a:rPr>
-              <a:t>warn us about the dangers of some current trend ↔ warn readers about today’s problems</a:t>
+              <a:t>Do not hunt for the summary’s words — hunt for the same meaning.</a:t>
             </a:r>
           </a:p>
           <a:p>
@@ -9140,7 +9146,7 @@
                 </a:solidFill>
                 <a:latin typeface="Aptos"/>
               </a:rPr>
-              <a:t>quaint, outdated problems ↔ old-fashioned problems</a:t>
+              <a:t>Read the whole sentence around the blank: “but”, “so”, “because” tell you how the idea is built.</a:t>
             </a:r>
           </a:p>
         </p:txBody>
@@ -9219,7 +9225,7 @@
                 </a:solidFill>
                 <a:latin typeface="Aptos"/>
               </a:rPr>
-              <a:t>4   Copy the EXACT word from the text — then check the form</a:t>
+              <a:t>4   Copy the EXACT word — then check the form</a:t>
             </a:r>
           </a:p>
           <a:p>
@@ -9231,7 +9237,7 @@
                 </a:solidFill>
                 <a:latin typeface="Aptos"/>
               </a:rPr>
-              <a:t>ONE word per blank — if the text prints a fixed pair, the pair counts as one answer.</a:t>
+              <a:t>ONE word per blank; a fixed pair printed in the text counts as one answer.</a:t>
             </a:r>
           </a:p>
           <a:p>
@@ -9243,7 +9249,7 @@
                 </a:solidFill>
                 <a:latin typeface="Aptos"/>
               </a:rPr>
-              <a:t>Keep the text’s form: -s, -ed, -ing, -er — and check the spelling.</a:t>
+              <a:t>Check the form: -s · -ed · -ing · -er · -ly — and check the spelling.</a:t>
             </a:r>
           </a:p>
         </p:txBody>
@@ -9703,7 +9709,7 @@
                 </a:solidFill>
                 <a:latin typeface="Aptos"/>
               </a:rPr>
-              <a:t>Cloze questions — 4 quick demos</a:t>
+              <a:t>Cloze questions — 4 demos on one paragraph</a:t>
             </a:r>
           </a:p>
         </p:txBody>
@@ -9892,8 +9898,8 @@
         </p:nvSpPr>
         <p:spPr>
           <a:xfrm>
-            <a:off x="502920" y="1133856"/>
-            <a:ext cx="11155680" cy="292608"/>
+            <a:off x="502920" y="1188720"/>
+            <a:ext cx="11155680" cy="274320"/>
           </a:xfrm>
           <a:prstGeom prst="rect">
             <a:avLst/>
@@ -9908,13 +9914,13 @@
           <a:p>
             <a:pPr algn="l"/>
             <a:r>
-              <a:rPr sz="1200" b="0" i="0">
+              <a:rPr sz="1150" b="0" i="0">
                 <a:solidFill>
                   <a:srgbClr val="5B7083"/>
                 </a:solidFill>
                 <a:latin typeface="Aptos"/>
               </a:rPr>
-              <a:t>(demo — taken from other paragraphs, NOT from the 6 questions you will do)</a:t>
+              <a:t>(demo — a made-up paragraph, not from the examination paper)</a:t>
             </a:r>
           </a:p>
         </p:txBody>
@@ -9928,7 +9934,7 @@
         <p:spPr>
           <a:xfrm>
             <a:off x="502920" y="1481328"/>
-            <a:ext cx="5440680" cy="2103120"/>
+            <a:ext cx="11201400" cy="1554480"/>
           </a:xfrm>
           <a:prstGeom prst="roundRect">
             <a:avLst/>
@@ -9965,14 +9971,14 @@
       </p:sp>
       <p:sp>
         <p:nvSpPr>
-          <p:cNvPr id="12" name="dh_55"/>
+          <p:cNvPr id="12" name="demo_head"/>
           <p:cNvSpPr txBox="1"/>
           <p:nvPr/>
         </p:nvSpPr>
         <p:spPr>
           <a:xfrm>
-            <a:off x="731520" y="1600200"/>
-            <a:ext cx="4983480" cy="292608"/>
+            <a:off x="731520" y="1572768"/>
+            <a:ext cx="10744200" cy="256032"/>
           </a:xfrm>
           <a:prstGeom prst="rect">
             <a:avLst/>
@@ -9993,21 +9999,21 @@
                 </a:solidFill>
                 <a:latin typeface="Aptos"/>
               </a:rPr>
-              <a:t>EASIER 1  ·  paragraph 6 (line 84)</a:t>
-            </a:r>
-          </a:p>
-        </p:txBody>
-      </p:sp>
-      <p:sp>
-        <p:nvSpPr>
-          <p:cNvPr id="13" name="ds_55"/>
+              <a:t>DEMO PARAGRAPH  —  read it together first</a:t>
+            </a:r>
+          </a:p>
+        </p:txBody>
+      </p:sp>
+      <p:sp>
+        <p:nvSpPr>
+          <p:cNvPr id="13" name="demo_para"/>
           <p:cNvSpPr txBox="1"/>
           <p:nvPr/>
         </p:nvSpPr>
         <p:spPr>
           <a:xfrm>
-            <a:off x="731520" y="1938528"/>
-            <a:ext cx="4983480" cy="960120"/>
+            <a:off x="731520" y="1865376"/>
+            <a:ext cx="10744200" cy="1097280"/>
           </a:xfrm>
           <a:prstGeom prst="rect">
             <a:avLst/>
@@ -10022,71 +10028,27 @@
           <a:p>
             <a:pPr algn="l"/>
             <a:r>
-              <a:rPr sz="1300" b="0" i="0">
+              <a:rPr sz="1350" b="0" i="0">
                 <a:solidFill>
                   <a:srgbClr val="17365D"/>
                 </a:solidFill>
                 <a:latin typeface="Aptos"/>
               </a:rPr>
-              <a:t>At the start of a dystopian story, the fictional world may seem (i) ______ enough.</a:t>
-            </a:r>
-          </a:p>
-        </p:txBody>
-      </p:sp>
-      <p:sp>
-        <p:nvSpPr>
-          <p:cNvPr id="14" name="demo_ans_55"/>
-          <p:cNvSpPr txBox="1"/>
-          <p:nvPr/>
-        </p:nvSpPr>
-        <p:spPr>
-          <a:xfrm>
-            <a:off x="731520" y="2944368"/>
-            <a:ext cx="4983480" cy="548640"/>
-          </a:xfrm>
-          <a:prstGeom prst="rect">
-            <a:avLst/>
-          </a:prstGeom>
-          <a:noFill/>
-        </p:spPr>
-        <p:txBody>
-          <a:bodyPr wrap="square" anchor="t" lIns="0" rIns="0" tIns="0" bIns="0">
-            <a:spAutoFit/>
-          </a:bodyPr>
-          <a:lstStyle/>
-          <a:p>
-            <a:pPr algn="l"/>
-            <a:r>
-              <a:rPr sz="1500" b="1" i="0">
-                <a:solidFill>
-                  <a:srgbClr val="FF0000"/>
-                </a:solidFill>
-                <a:latin typeface="Aptos"/>
-              </a:rPr>
-              <a:t>(i)  pleasant</a:t>
-            </a:r>
-            <a:r>
-              <a:rPr sz="1100" b="0" i="0">
-                <a:solidFill>
-                  <a:srgbClr val="5B7083"/>
-                </a:solidFill>
-                <a:latin typeface="Aptos"/>
-              </a:rPr>
-              <a:t>      1 mark</a:t>
-            </a:r>
-          </a:p>
-        </p:txBody>
-      </p:sp>
-      <p:sp>
-        <p:nvSpPr>
-          <p:cNvPr id="15" name="Rounded Rectangle 14"/>
+              <a:t>Last year, our school library started a lunchtime reading club. At first, only eight students came, and the librarian, Ms Wong, lent them books from her own shelf. Then the club began posting short book reviews on the school’s social media page, and the reviews spread quickly: by the end of the term, more than two hundred students had joined the club. Ms Wong has asked the principal for a bigger room, because the club is now the busiest place in the school. Some teachers worried that the club would distract students from their homework, but the library’s records show that club members borrow twice as many books as other students.</a:t>
+            </a:r>
+          </a:p>
+        </p:txBody>
+      </p:sp>
+      <p:sp>
+        <p:nvSpPr>
+          <p:cNvPr id="14" name="Rounded Rectangle 13"/>
           <p:cNvSpPr/>
           <p:nvPr/>
         </p:nvSpPr>
         <p:spPr>
           <a:xfrm>
-            <a:off x="6263640" y="1481328"/>
-            <a:ext cx="5440680" cy="2103120"/>
+            <a:off x="502920" y="3154680"/>
+            <a:ext cx="5440680" cy="1389888"/>
           </a:xfrm>
           <a:prstGeom prst="roundRect">
             <a:avLst/>
@@ -10123,14 +10085,14 @@
       </p:sp>
       <p:sp>
         <p:nvSpPr>
-          <p:cNvPr id="16" name="dh_685"/>
+          <p:cNvPr id="15" name="dh_55"/>
           <p:cNvSpPr txBox="1"/>
           <p:nvPr/>
         </p:nvSpPr>
         <p:spPr>
           <a:xfrm>
-            <a:off x="6492240" y="1600200"/>
-            <a:ext cx="4983480" cy="292608"/>
+            <a:off x="722376" y="3246120"/>
+            <a:ext cx="5001768" cy="237744"/>
           </a:xfrm>
           <a:prstGeom prst="rect">
             <a:avLst/>
@@ -10145,27 +10107,27 @@
           <a:p>
             <a:pPr algn="l"/>
             <a:r>
-              <a:rPr sz="1300" b="1" i="0">
+              <a:rPr sz="1200" b="1" i="0">
                 <a:solidFill>
                   <a:srgbClr val="2F75B5"/>
                 </a:solidFill>
                 <a:latin typeface="Aptos"/>
               </a:rPr>
-              <a:t>EASIER 2  ·  paragraph 5 (lines 57–58)</a:t>
-            </a:r>
-          </a:p>
-        </p:txBody>
-      </p:sp>
-      <p:sp>
-        <p:nvSpPr>
-          <p:cNvPr id="17" name="ds_685"/>
+              <a:t>EASIER 1  ·  ONE word</a:t>
+            </a:r>
+          </a:p>
+        </p:txBody>
+      </p:sp>
+      <p:sp>
+        <p:nvSpPr>
+          <p:cNvPr id="16" name="ds_55"/>
           <p:cNvSpPr txBox="1"/>
           <p:nvPr/>
         </p:nvSpPr>
         <p:spPr>
           <a:xfrm>
-            <a:off x="6492240" y="1938528"/>
-            <a:ext cx="4983480" cy="960120"/>
+            <a:off x="722376" y="3502152"/>
+            <a:ext cx="5001768" cy="658368"/>
           </a:xfrm>
           <a:prstGeom prst="rect">
             <a:avLst/>
@@ -10180,27 +10142,27 @@
           <a:p>
             <a:pPr algn="l"/>
             <a:r>
-              <a:rPr sz="1300" b="0" i="0">
+              <a:rPr sz="1250" b="0" i="0">
                 <a:solidFill>
                   <a:srgbClr val="17365D"/>
                 </a:solidFill>
                 <a:latin typeface="Aptos"/>
               </a:rPr>
-              <a:t>Dystopian novels for young-adult readers have been around for (i) ______.</a:t>
-            </a:r>
-          </a:p>
-        </p:txBody>
-      </p:sp>
-      <p:sp>
-        <p:nvSpPr>
-          <p:cNvPr id="18" name="demo_ans_685"/>
+              <a:t>The librarian lent the first students books from her (i) ______ shelf.</a:t>
+            </a:r>
+          </a:p>
+        </p:txBody>
+      </p:sp>
+      <p:sp>
+        <p:nvSpPr>
+          <p:cNvPr id="17" name="demo_ans_55"/>
           <p:cNvSpPr txBox="1"/>
           <p:nvPr/>
         </p:nvSpPr>
         <p:spPr>
           <a:xfrm>
-            <a:off x="6492240" y="2944368"/>
-            <a:ext cx="4983480" cy="548640"/>
+            <a:off x="722376" y="4197096"/>
+            <a:ext cx="5001768" cy="292608"/>
           </a:xfrm>
           <a:prstGeom prst="rect">
             <a:avLst/>
@@ -10215,36 +10177,194 @@
           <a:p>
             <a:pPr algn="l"/>
             <a:r>
-              <a:rPr sz="1500" b="1" i="0">
+              <a:rPr sz="1400" b="1" i="0">
                 <a:solidFill>
                   <a:srgbClr val="FF0000"/>
                 </a:solidFill>
                 <a:latin typeface="Aptos"/>
               </a:rPr>
-              <a:t>(i)  decades   —  watch the plural -s!</a:t>
-            </a:r>
-            <a:r>
-              <a:rPr sz="1100" b="0" i="0">
+              <a:t>(i)  own      </a:t>
+            </a:r>
+            <a:r>
+              <a:rPr sz="1050" b="0" i="0">
                 <a:solidFill>
                   <a:srgbClr val="5B7083"/>
                 </a:solidFill>
                 <a:latin typeface="Aptos"/>
               </a:rPr>
-              <a:t>      1 mark</a:t>
-            </a:r>
-          </a:p>
-        </p:txBody>
-      </p:sp>
-      <p:sp>
-        <p:nvSpPr>
-          <p:cNvPr id="19" name="Rounded Rectangle 18"/>
+              <a:t>1 mark</a:t>
+            </a:r>
+          </a:p>
+        </p:txBody>
+      </p:sp>
+      <p:sp>
+        <p:nvSpPr>
+          <p:cNvPr id="18" name="Rounded Rectangle 17"/>
           <p:cNvSpPr/>
           <p:nvPr/>
         </p:nvSpPr>
         <p:spPr>
           <a:xfrm>
-            <a:off x="502920" y="3749039"/>
-            <a:ext cx="5440680" cy="2103120"/>
+            <a:off x="6263640" y="3154680"/>
+            <a:ext cx="5440680" cy="1389888"/>
+          </a:xfrm>
+          <a:prstGeom prst="roundRect">
+            <a:avLst/>
+          </a:prstGeom>
+          <a:solidFill>
+            <a:srgbClr val="EAF3F8"/>
+          </a:solidFill>
+          <a:ln>
+            <a:noFill/>
+          </a:ln>
+          <a:effectLst/>
+        </p:spPr>
+        <p:style>
+          <a:lnRef idx="1">
+            <a:schemeClr val="accent1"/>
+          </a:lnRef>
+          <a:fillRef idx="3">
+            <a:schemeClr val="accent1"/>
+          </a:fillRef>
+          <a:effectRef idx="2">
+            <a:schemeClr val="accent1"/>
+          </a:effectRef>
+          <a:fontRef idx="minor">
+            <a:schemeClr val="lt1"/>
+          </a:fontRef>
+        </p:style>
+        <p:txBody>
+          <a:bodyPr rtlCol="0" anchor="ctr"/>
+          <a:lstStyle/>
+          <a:p>
+            <a:pPr algn="ctr"/>
+          </a:p>
+        </p:txBody>
+      </p:sp>
+      <p:sp>
+        <p:nvSpPr>
+          <p:cNvPr id="19" name="dh_685"/>
+          <p:cNvSpPr txBox="1"/>
+          <p:nvPr/>
+        </p:nvSpPr>
+        <p:spPr>
+          <a:xfrm>
+            <a:off x="6483096" y="3246120"/>
+            <a:ext cx="5001768" cy="237744"/>
+          </a:xfrm>
+          <a:prstGeom prst="rect">
+            <a:avLst/>
+          </a:prstGeom>
+          <a:noFill/>
+        </p:spPr>
+        <p:txBody>
+          <a:bodyPr wrap="square" anchor="t" lIns="0" rIns="0" tIns="0" bIns="0">
+            <a:spAutoFit/>
+          </a:bodyPr>
+          <a:lstStyle/>
+          <a:p>
+            <a:pPr algn="l"/>
+            <a:r>
+              <a:rPr sz="1200" b="1" i="0">
+                <a:solidFill>
+                  <a:srgbClr val="2F75B5"/>
+                </a:solidFill>
+                <a:latin typeface="Aptos"/>
+              </a:rPr>
+              <a:t>EASIER 2  ·  ONE word</a:t>
+            </a:r>
+          </a:p>
+        </p:txBody>
+      </p:sp>
+      <p:sp>
+        <p:nvSpPr>
+          <p:cNvPr id="20" name="ds_685"/>
+          <p:cNvSpPr txBox="1"/>
+          <p:nvPr/>
+        </p:nvSpPr>
+        <p:spPr>
+          <a:xfrm>
+            <a:off x="6483096" y="3502152"/>
+            <a:ext cx="5001768" cy="658368"/>
+          </a:xfrm>
+          <a:prstGeom prst="rect">
+            <a:avLst/>
+          </a:prstGeom>
+          <a:noFill/>
+        </p:spPr>
+        <p:txBody>
+          <a:bodyPr wrap="square" anchor="t" lIns="0" rIns="0" tIns="0" bIns="0">
+            <a:spAutoFit/>
+          </a:bodyPr>
+          <a:lstStyle/>
+          <a:p>
+            <a:pPr algn="l"/>
+            <a:r>
+              <a:rPr sz="1250" b="0" i="0">
+                <a:solidFill>
+                  <a:srgbClr val="17365D"/>
+                </a:solidFill>
+                <a:latin typeface="Aptos"/>
+              </a:rPr>
+              <a:t>By the end of the term, more than two (i) ______ students had joined the club.</a:t>
+            </a:r>
+          </a:p>
+        </p:txBody>
+      </p:sp>
+      <p:sp>
+        <p:nvSpPr>
+          <p:cNvPr id="21" name="demo_ans_685"/>
+          <p:cNvSpPr txBox="1"/>
+          <p:nvPr/>
+        </p:nvSpPr>
+        <p:spPr>
+          <a:xfrm>
+            <a:off x="6483096" y="4197096"/>
+            <a:ext cx="5001768" cy="292608"/>
+          </a:xfrm>
+          <a:prstGeom prst="rect">
+            <a:avLst/>
+          </a:prstGeom>
+          <a:noFill/>
+        </p:spPr>
+        <p:txBody>
+          <a:bodyPr wrap="square" anchor="t" lIns="0" rIns="0" tIns="0" bIns="0">
+            <a:spAutoFit/>
+          </a:bodyPr>
+          <a:lstStyle/>
+          <a:p>
+            <a:pPr algn="l"/>
+            <a:r>
+              <a:rPr sz="1400" b="1" i="0">
+                <a:solidFill>
+                  <a:srgbClr val="FF0000"/>
+                </a:solidFill>
+                <a:latin typeface="Aptos"/>
+              </a:rPr>
+              <a:t>(i)  hundred      </a:t>
+            </a:r>
+            <a:r>
+              <a:rPr sz="1050" b="0" i="0">
+                <a:solidFill>
+                  <a:srgbClr val="5B7083"/>
+                </a:solidFill>
+                <a:latin typeface="Aptos"/>
+              </a:rPr>
+              <a:t>1 mark</a:t>
+            </a:r>
+          </a:p>
+        </p:txBody>
+      </p:sp>
+      <p:sp>
+        <p:nvSpPr>
+          <p:cNvPr id="22" name="Rounded Rectangle 21"/>
+          <p:cNvSpPr/>
+          <p:nvPr/>
+        </p:nvSpPr>
+        <p:spPr>
+          <a:xfrm>
+            <a:off x="502920" y="4663440"/>
+            <a:ext cx="5440680" cy="1389888"/>
           </a:xfrm>
           <a:prstGeom prst="roundRect">
             <a:avLst/>
@@ -10281,14 +10401,14 @@
       </p:sp>
       <p:sp>
         <p:nvSpPr>
-          <p:cNvPr id="20" name="dh_55"/>
+          <p:cNvPr id="23" name="dh_55"/>
           <p:cNvSpPr txBox="1"/>
           <p:nvPr/>
         </p:nvSpPr>
         <p:spPr>
           <a:xfrm>
-            <a:off x="731520" y="3867911"/>
-            <a:ext cx="4983480" cy="292608"/>
+            <a:off x="722376" y="4754879"/>
+            <a:ext cx="5001768" cy="237744"/>
           </a:xfrm>
           <a:prstGeom prst="rect">
             <a:avLst/>
@@ -10303,27 +10423,27 @@
           <a:p>
             <a:pPr algn="l"/>
             <a:r>
-              <a:rPr sz="1300" b="1" i="0">
+              <a:rPr sz="1200" b="1" i="0">
                 <a:solidFill>
                   <a:srgbClr val="2F75B5"/>
                 </a:solidFill>
                 <a:latin typeface="Aptos"/>
               </a:rPr>
-              <a:t>HARDER 1  ·  paragraph 9 (lines 141–143)</a:t>
-            </a:r>
-          </a:p>
-        </p:txBody>
-      </p:sp>
-      <p:sp>
-        <p:nvSpPr>
-          <p:cNvPr id="21" name="ds_55"/>
+              <a:t>HARDER 1  ·  ONE word</a:t>
+            </a:r>
+          </a:p>
+        </p:txBody>
+      </p:sp>
+      <p:sp>
+        <p:nvSpPr>
+          <p:cNvPr id="24" name="ds_55"/>
           <p:cNvSpPr txBox="1"/>
           <p:nvPr/>
         </p:nvSpPr>
         <p:spPr>
           <a:xfrm>
-            <a:off x="731520" y="4206240"/>
-            <a:ext cx="4983480" cy="960120"/>
+            <a:off x="722376" y="5010912"/>
+            <a:ext cx="5001768" cy="658368"/>
           </a:xfrm>
           <a:prstGeom prst="rect">
             <a:avLst/>
@@ -10338,27 +10458,27 @@
           <a:p>
             <a:pPr algn="l"/>
             <a:r>
-              <a:rPr sz="1300" b="0" i="0">
+              <a:rPr sz="1250" b="0" i="0">
                 <a:solidFill>
                   <a:srgbClr val="17365D"/>
                 </a:solidFill>
                 <a:latin typeface="Aptos"/>
               </a:rPr>
-              <a:t>The Hunger Games could be taken as an (i) ______ of reality TV, but it is not an (ii) ______.</a:t>
-            </a:r>
-          </a:p>
-        </p:txBody>
-      </p:sp>
-      <p:sp>
-        <p:nvSpPr>
-          <p:cNvPr id="22" name="demo_ans_55"/>
+              <a:t>The club grew (i) ______ after its book reviews appeared online.</a:t>
+            </a:r>
+          </a:p>
+        </p:txBody>
+      </p:sp>
+      <p:sp>
+        <p:nvSpPr>
+          <p:cNvPr id="25" name="demo_ans_55"/>
           <p:cNvSpPr txBox="1"/>
           <p:nvPr/>
         </p:nvSpPr>
         <p:spPr>
           <a:xfrm>
-            <a:off x="731520" y="5212079"/>
-            <a:ext cx="4983480" cy="548640"/>
+            <a:off x="722376" y="5705855"/>
+            <a:ext cx="5001768" cy="292608"/>
           </a:xfrm>
           <a:prstGeom prst="rect">
             <a:avLst/>
@@ -10373,36 +10493,36 @@
           <a:p>
             <a:pPr algn="l"/>
             <a:r>
-              <a:rPr sz="1500" b="1" i="0">
+              <a:rPr sz="1400" b="1" i="0">
                 <a:solidFill>
                   <a:srgbClr val="FF0000"/>
                 </a:solidFill>
                 <a:latin typeface="Aptos"/>
               </a:rPr>
-              <a:t>(i)  indictment       (ii)  argument</a:t>
-            </a:r>
-            <a:r>
-              <a:rPr sz="1100" b="0" i="0">
+              <a:t>(i)  quickly      </a:t>
+            </a:r>
+            <a:r>
+              <a:rPr sz="1050" b="0" i="0">
                 <a:solidFill>
                   <a:srgbClr val="5B7083"/>
                 </a:solidFill>
                 <a:latin typeface="Aptos"/>
               </a:rPr>
-              <a:t>      2 marks</a:t>
-            </a:r>
-          </a:p>
-        </p:txBody>
-      </p:sp>
-      <p:sp>
-        <p:nvSpPr>
-          <p:cNvPr id="23" name="Rounded Rectangle 22"/>
+              <a:t>1 mark</a:t>
+            </a:r>
+          </a:p>
+        </p:txBody>
+      </p:sp>
+      <p:sp>
+        <p:nvSpPr>
+          <p:cNvPr id="26" name="Rounded Rectangle 25"/>
           <p:cNvSpPr/>
           <p:nvPr/>
         </p:nvSpPr>
         <p:spPr>
           <a:xfrm>
-            <a:off x="6263640" y="3749039"/>
-            <a:ext cx="5440680" cy="2103120"/>
+            <a:off x="6263640" y="4663440"/>
+            <a:ext cx="5440680" cy="1389888"/>
           </a:xfrm>
           <a:prstGeom prst="roundRect">
             <a:avLst/>
@@ -10439,14 +10559,14 @@
       </p:sp>
       <p:sp>
         <p:nvSpPr>
-          <p:cNvPr id="24" name="dh_685"/>
+          <p:cNvPr id="27" name="dh_685"/>
           <p:cNvSpPr txBox="1"/>
           <p:nvPr/>
         </p:nvSpPr>
         <p:spPr>
           <a:xfrm>
-            <a:off x="6492240" y="3867911"/>
-            <a:ext cx="4983480" cy="292608"/>
+            <a:off x="6483096" y="4754879"/>
+            <a:ext cx="5001768" cy="237744"/>
           </a:xfrm>
           <a:prstGeom prst="rect">
             <a:avLst/>
@@ -10461,27 +10581,27 @@
           <a:p>
             <a:pPr algn="l"/>
             <a:r>
-              <a:rPr sz="1300" b="1" i="0">
+              <a:rPr sz="1200" b="1" i="0">
                 <a:solidFill>
                   <a:srgbClr val="2F75B5"/>
                 </a:solidFill>
                 <a:latin typeface="Aptos"/>
               </a:rPr>
-              <a:t>HARDER 2  ·  paragraph 7 (lines 110–117)</a:t>
-            </a:r>
-          </a:p>
-        </p:txBody>
-      </p:sp>
-      <p:sp>
-        <p:nvSpPr>
-          <p:cNvPr id="25" name="ds_685"/>
+              <a:t>HARDER 2  ·  TWO words</a:t>
+            </a:r>
+          </a:p>
+        </p:txBody>
+      </p:sp>
+      <p:sp>
+        <p:nvSpPr>
+          <p:cNvPr id="28" name="ds_685"/>
           <p:cNvSpPr txBox="1"/>
           <p:nvPr/>
         </p:nvSpPr>
         <p:spPr>
           <a:xfrm>
-            <a:off x="6492240" y="4206240"/>
-            <a:ext cx="4983480" cy="960120"/>
+            <a:off x="6483096" y="5010912"/>
+            <a:ext cx="5001768" cy="658368"/>
           </a:xfrm>
           <a:prstGeom prst="rect">
             <a:avLst/>
@@ -10496,27 +10616,27 @@
           <a:p>
             <a:pPr algn="l"/>
             <a:r>
-              <a:rPr sz="1300" b="0" i="0">
+              <a:rPr sz="1250" b="0" i="0">
                 <a:solidFill>
                   <a:srgbClr val="17365D"/>
                 </a:solidFill>
                 <a:latin typeface="Aptos"/>
               </a:rPr>
-              <a:t>Sambell argues that the protagonist’s final defeat is (i) ______ to the admonitory nature of the classic adult dystopia, and that children’s authors are (ii) ______ to depict the extinction of hope.</a:t>
-            </a:r>
-          </a:p>
-        </p:txBody>
-      </p:sp>
-      <p:sp>
-        <p:nvSpPr>
-          <p:cNvPr id="26" name="demo_ans_685"/>
+              <a:t>Some teachers worried that the club would (i) ______ students from their homework, but the library’s records show that members (ii) ______ more books than other students.</a:t>
+            </a:r>
+          </a:p>
+        </p:txBody>
+      </p:sp>
+      <p:sp>
+        <p:nvSpPr>
+          <p:cNvPr id="29" name="demo_ans_685"/>
           <p:cNvSpPr txBox="1"/>
           <p:nvPr/>
         </p:nvSpPr>
         <p:spPr>
           <a:xfrm>
-            <a:off x="6492240" y="5212079"/>
-            <a:ext cx="4983480" cy="548640"/>
+            <a:off x="6483096" y="5705855"/>
+            <a:ext cx="5001768" cy="292608"/>
           </a:xfrm>
           <a:prstGeom prst="rect">
             <a:avLst/>
@@ -10531,36 +10651,36 @@
           <a:p>
             <a:pPr algn="l"/>
             <a:r>
-              <a:rPr sz="1500" b="1" i="0">
+              <a:rPr sz="1400" b="1" i="0">
                 <a:solidFill>
                   <a:srgbClr val="FF0000"/>
                 </a:solidFill>
                 <a:latin typeface="Aptos"/>
               </a:rPr>
-              <a:t>(i)  crucial            (ii)  reluctant</a:t>
-            </a:r>
-            <a:r>
-              <a:rPr sz="1100" b="0" i="0">
+              <a:t>(i)  distract        (ii)  borrow      </a:t>
+            </a:r>
+            <a:r>
+              <a:rPr sz="1050" b="0" i="0">
                 <a:solidFill>
                   <a:srgbClr val="5B7083"/>
                 </a:solidFill>
                 <a:latin typeface="Aptos"/>
               </a:rPr>
-              <a:t>      2 marks</a:t>
-            </a:r>
-          </a:p>
-        </p:txBody>
-      </p:sp>
-      <p:sp>
-        <p:nvSpPr>
-          <p:cNvPr id="27" name="demo_foot"/>
+              <a:t>2 marks</a:t>
+            </a:r>
+          </a:p>
+        </p:txBody>
+      </p:sp>
+      <p:sp>
+        <p:nvSpPr>
+          <p:cNvPr id="30" name="demo_foot"/>
           <p:cNvSpPr txBox="1"/>
           <p:nvPr/>
         </p:nvSpPr>
         <p:spPr>
           <a:xfrm>
-            <a:off x="502920" y="6035040"/>
-            <a:ext cx="11155680" cy="365760"/>
+            <a:off x="502920" y="6172200"/>
+            <a:ext cx="11155680" cy="329184"/>
           </a:xfrm>
           <a:prstGeom prst="rect">
             <a:avLst/>
@@ -10575,13 +10695,13 @@
           <a:p>
             <a:pPr algn="l"/>
             <a:r>
-              <a:rPr sz="1500" b="1" i="0">
+              <a:rPr sz="1400" b="1" i="0">
                 <a:solidFill>
                   <a:srgbClr val="2F75B5"/>
                 </a:solidFill>
                 <a:latin typeface="Aptos"/>
               </a:rPr>
-              <a:t>1  word class  →  2  find the paragraph  →  3  copy the exact word  →  4  check the form</a:t>
+              <a:t>1  word class  →  2  read around the blank  →  3  copy the exact word  →  4  check the form</a:t>
             </a:r>
           </a:p>
         </p:txBody>
@@ -10613,7 +10733,7 @@
                               </p:stCondLst>
                             </p:cTn>
                             <p:tgtEl>
-                              <p:spTgt spid="14"/>
+                              <p:spTgt spid="17"/>
                             </p:tgtEl>
                             <p:attrNameLst>
                               <p:attrName>style.visibility</p:attrName>
@@ -10627,7 +10747,7 @@
                           <p:cBhvr>
                             <p:cTn id="5" dur="500"/>
                             <p:tgtEl>
-                              <p:spTgt spid="14"/>
+                              <p:spTgt spid="17"/>
                             </p:tgtEl>
                           </p:cBhvr>
                         </p:animEffect>
@@ -10648,7 +10768,7 @@
                               </p:stCondLst>
                             </p:cTn>
                             <p:tgtEl>
-                              <p:spTgt spid="18"/>
+                              <p:spTgt spid="21"/>
                             </p:tgtEl>
                             <p:attrNameLst>
                               <p:attrName>style.visibility</p:attrName>
@@ -10662,7 +10782,7 @@
                           <p:cBhvr>
                             <p:cTn id="9" dur="500"/>
                             <p:tgtEl>
-                              <p:spTgt spid="18"/>
+                              <p:spTgt spid="21"/>
                             </p:tgtEl>
                           </p:cBhvr>
                         </p:animEffect>
@@ -10683,7 +10803,7 @@
                               </p:stCondLst>
                             </p:cTn>
                             <p:tgtEl>
-                              <p:spTgt spid="22"/>
+                              <p:spTgt spid="25"/>
                             </p:tgtEl>
                             <p:attrNameLst>
                               <p:attrName>style.visibility</p:attrName>
@@ -10697,7 +10817,7 @@
                           <p:cBhvr>
                             <p:cTn id="13" dur="500"/>
                             <p:tgtEl>
-                              <p:spTgt spid="22"/>
+                              <p:spTgt spid="25"/>
                             </p:tgtEl>
                           </p:cBhvr>
                         </p:animEffect>
@@ -10718,7 +10838,7 @@
                               </p:stCondLst>
                             </p:cTn>
                             <p:tgtEl>
-                              <p:spTgt spid="26"/>
+                              <p:spTgt spid="29"/>
                             </p:tgtEl>
                             <p:attrNameLst>
                               <p:attrName>style.visibility</p:attrName>
@@ -10732,7 +10852,7 @@
                           <p:cBhvr>
                             <p:cTn id="17" dur="500"/>
                             <p:tgtEl>
-                              <p:spTgt spid="26"/>
+                              <p:spTgt spid="29"/>
                             </p:tgtEl>
                           </p:cBhvr>
                         </p:animEffect>
